--- a/slayt.pptx
+++ b/slayt.pptx
@@ -8,7 +8,7 @@
     <p:notesMasterId r:id="rId14"/>
   </p:notesMasterIdLst>
   <p:sldIdLst>
-    <p:sldId id="256" r:id="rId2"/>
+    <p:sldId id="275" r:id="rId2"/>
     <p:sldId id="257" r:id="rId3"/>
     <p:sldId id="258" r:id="rId4"/>
     <p:sldId id="259" r:id="rId5"/>
@@ -2462,7 +2462,158 @@
           </a:p>
         </p:txBody>
       </p:sp>
+      <p:sp>
+        <p:nvSpPr>
+          <p:cNvPr id="2" name="TextBox 1">
+            <a:extLst>
+              <a:ext uri="{FF2B5EF4-FFF2-40B4-BE49-F238E27FC236}">
+                <a16:creationId xmlns:a16="http://schemas.microsoft.com/office/drawing/2014/main" id="{855B4769-8A09-457B-AC30-7E9305FE084D}"/>
+              </a:ext>
+            </a:extLst>
+          </p:cNvPr>
+          <p:cNvSpPr txBox="1"/>
+          <p:nvPr/>
+        </p:nvSpPr>
+        <p:spPr>
+          <a:xfrm>
+            <a:off x="7239000" y="1371600"/>
+            <a:ext cx="4699000" cy="1016000"/>
+          </a:xfrm>
+          <a:prstGeom prst="rect">
+            <a:avLst/>
+          </a:prstGeom>
+          <a:noFill/>
+        </p:spPr>
+        <p:txBody>
+          <a:bodyPr vertOverflow="overflow" vert="horz" wrap="square" rtlCol="0" anchor="ctr" anchorCtr="0">
+            <a:noAutofit/>
+          </a:bodyPr>
+          <a:lstStyle/>
+          <a:p>
+            <a:pPr marL="0" indent="0" algn="l">
+              <a:lnSpc>
+                <a:spcPts val="2400"/>
+              </a:lnSpc>
+              <a:buNone/>
+            </a:pPr>
+            <a:r>
+              <a:rPr lang="en-US" sz="1300" b="1" kern="0" spc="0" dirty="0">
+                <a:solidFill>
+                  <a:srgbClr val="0891B2"/>
+                </a:solidFill>
+                <a:latin typeface="Consolas" pitchFamily="34" charset="0"/>
+                <a:ea typeface="Consolas" pitchFamily="34" charset="-122"/>
+                <a:cs typeface="Consolas" pitchFamily="34" charset="-120"/>
+              </a:rPr>
+              <a:t>220201018</a:t>
+            </a:r>
+            <a:r>
+              <a:rPr lang="en-US" sz="1400" dirty="0">
+                <a:solidFill>
+                  <a:srgbClr val="0F172A"/>
+                </a:solidFill>
+                <a:latin typeface="Calibri" pitchFamily="34" charset="0"/>
+              </a:rPr>
+              <a:t>  </a:t>
+            </a:r>
+            <a:r>
+              <a:rPr lang="en-US" sz="1400" b="1" dirty="0">
+                <a:solidFill>
+                  <a:srgbClr val="0F172A"/>
+                </a:solidFill>
+                <a:latin typeface="Calibri" pitchFamily="34" charset="0"/>
+                <a:ea typeface="Calibri" pitchFamily="34" charset="-122"/>
+                <a:cs typeface="Calibri" pitchFamily="34" charset="-120"/>
+              </a:rPr>
+              <a:t>Abdulrahman Dülek</a:t>
+            </a:r>
+          </a:p>
+          <a:p>
+            <a:pPr marL="0" indent="0" algn="l">
+              <a:lnSpc>
+                <a:spcPts val="2400"/>
+              </a:lnSpc>
+              <a:buNone/>
+            </a:pPr>
+            <a:r>
+              <a:rPr lang="en-US" sz="1300" b="1" kern="0" spc="0" dirty="0">
+                <a:solidFill>
+                  <a:srgbClr val="0891B2"/>
+                </a:solidFill>
+                <a:latin typeface="Consolas" pitchFamily="34" charset="0"/>
+                <a:ea typeface="Consolas" pitchFamily="34" charset="-122"/>
+                <a:cs typeface="Consolas" pitchFamily="34" charset="-120"/>
+              </a:rPr>
+              <a:t>220201061</a:t>
+            </a:r>
+            <a:r>
+              <a:rPr lang="en-US" sz="1400" dirty="0">
+                <a:solidFill>
+                  <a:srgbClr val="0F172A"/>
+                </a:solidFill>
+                <a:latin typeface="Calibri" pitchFamily="34" charset="0"/>
+              </a:rPr>
+              <a:t>  </a:t>
+            </a:r>
+            <a:r>
+              <a:rPr lang="en-US" sz="1400" b="1" dirty="0">
+                <a:solidFill>
+                  <a:srgbClr val="0F172A"/>
+                </a:solidFill>
+                <a:latin typeface="Calibri" pitchFamily="34" charset="0"/>
+                <a:ea typeface="Calibri" pitchFamily="34" charset="-122"/>
+                <a:cs typeface="Calibri" pitchFamily="34" charset="-120"/>
+              </a:rPr>
+              <a:t>Eyüp Ensar Kara</a:t>
+            </a:r>
+          </a:p>
+          <a:p>
+            <a:pPr marL="0" indent="0" algn="l">
+              <a:lnSpc>
+                <a:spcPts val="2400"/>
+              </a:lnSpc>
+              <a:buNone/>
+            </a:pPr>
+            <a:r>
+              <a:rPr lang="en-US" sz="1300" b="1" kern="0" spc="0" dirty="0">
+                <a:solidFill>
+                  <a:srgbClr val="0891B2"/>
+                </a:solidFill>
+                <a:latin typeface="Consolas" pitchFamily="34" charset="0"/>
+                <a:ea typeface="Consolas" pitchFamily="34" charset="-122"/>
+                <a:cs typeface="Consolas" pitchFamily="34" charset="-120"/>
+              </a:rPr>
+              <a:t>220201083</a:t>
+            </a:r>
+            <a:r>
+              <a:rPr lang="en-US" sz="1400" dirty="0">
+                <a:solidFill>
+                  <a:srgbClr val="0F172A"/>
+                </a:solidFill>
+                <a:latin typeface="Calibri" pitchFamily="34" charset="0"/>
+              </a:rPr>
+              <a:t>  </a:t>
+            </a:r>
+            <a:r>
+              <a:rPr lang="en-US" sz="1400" b="1" dirty="0">
+                <a:solidFill>
+                  <a:srgbClr val="0F172A"/>
+                </a:solidFill>
+                <a:latin typeface="Calibri" pitchFamily="34" charset="0"/>
+                <a:ea typeface="Calibri" pitchFamily="34" charset="-122"/>
+                <a:cs typeface="Calibri" pitchFamily="34" charset="-120"/>
+              </a:rPr>
+              <a:t>Yunus Hanifi Öztürk</a:t>
+            </a:r>
+          </a:p>
+        </p:txBody>
+      </p:sp>
     </p:spTree>
+    <p:extLst>
+      <p:ext uri="{BB962C8B-B14F-4D97-AF65-F5344CB8AC3E}">
+        <p14:creationId xmlns:p14="http://schemas.microsoft.com/office/powerpoint/2010/main" val="871984171"/>
+      </p:ext>
+    </p:extLst>
   </p:cSld>
   <p:clrMapOvr>
     <a:masterClrMapping/>
@@ -5499,6 +5650,39 @@
               <a:t>http://localhost:8501</a:t>
             </a:r>
             <a:endParaRPr lang="en-US" sz="1500" dirty="0"/>
+          </a:p>
+        </p:txBody>
+      </p:sp>
+      <p:sp>
+        <p:nvSpPr>
+          <p:cNvPr id="13" name="TextBox 12">
+            <a:extLst>
+              <a:ext uri="{FF2B5EF4-FFF2-40B4-BE49-F238E27FC236}">
+                <a16:creationId xmlns:a16="http://schemas.microsoft.com/office/drawing/2014/main" id="{20513E5F-2CD6-4D3A-A054-1EE5B73CACDA}"/>
+              </a:ext>
+            </a:extLst>
+          </p:cNvPr>
+          <p:cNvSpPr txBox="1"/>
+          <p:nvPr/>
+        </p:nvSpPr>
+        <p:spPr>
+          <a:xfrm>
+            <a:off x="457200" y="4597400"/>
+            <a:ext cx="11277600" cy="457200"/>
+          </a:xfrm>
+          <a:prstGeom prst="rect">
+            <a:avLst/>
+          </a:prstGeom>
+          <a:noFill/>
+        </p:spPr>
+        <p:txBody>
+          <a:bodyPr vertOverflow="overflow" vert="horz" wrap="square" rtlCol="0" anchor="t">
+            <a:spAutoFit/>
+          </a:bodyPr>
+          <a:lstStyle/>
+          <a:p>
+            <a:pPr algn="l"/>
+            <a:endParaRPr lang="en-US"/>
           </a:p>
         </p:txBody>
       </p:sp>
@@ -18763,7 +18947,7 @@
 
 <file path=ppt/webextensions/taskpanes.xml><?xml version="1.0" encoding="utf-8"?>
 <wetp:taskpanes xmlns:wetp="http://schemas.microsoft.com/office/webextensions/taskpanes/2010/11">
-  <wetp:taskpane dockstate="right" visibility="0" width="467" row="0">
+  <wetp:taskpane dockstate="right" visibility="0" width="438" row="0">
     <wetp:webextensionref xmlns:r="http://schemas.openxmlformats.org/officeDocument/2006/relationships" r:id="rId1"/>
   </wetp:taskpane>
 </wetp:taskpanes>
